--- a/plottingCode/Fig1_schematic/formation_channels_legend.pptx
+++ b/plottingCode/Fig1_schematic/formation_channels_legend.pptx
@@ -116,6 +116,11 @@
             <a:srgbClr val="A4A3A4"/>
           </p15:clr>
         </p15:guide>
+        <p15:guide id="2" pos="3840">
+          <p15:clr>
+            <a:srgbClr val="A4A3A4"/>
+          </p15:clr>
+        </p15:guide>
       </p15:sldGuideLst>
     </p:ext>
   </p:extLst>
@@ -204,7 +209,7 @@
           <a:p>
             <a:fld id="{BDAC1B45-61CC-B64D-BCEF-949BE053BD15}" type="datetimeFigureOut">
               <a:rPr lang="en-US" smtClean="0"/>
-              <a:t>9/4/25</a:t>
+              <a:t>10/20/25</a:t>
             </a:fld>
             <a:endParaRPr lang="en-US"/>
           </a:p>
@@ -794,7 +799,7 @@
           <a:p>
             <a:fld id="{DA65CD7A-DB9E-E745-8EE8-D0AEE8EA9938}" type="datetimeFigureOut">
               <a:rPr lang="en-US" smtClean="0"/>
-              <a:t>9/4/25</a:t>
+              <a:t>10/20/25</a:t>
             </a:fld>
             <a:endParaRPr lang="en-US"/>
           </a:p>
@@ -964,7 +969,7 @@
           <a:p>
             <a:fld id="{DA65CD7A-DB9E-E745-8EE8-D0AEE8EA9938}" type="datetimeFigureOut">
               <a:rPr lang="en-US" smtClean="0"/>
-              <a:t>9/4/25</a:t>
+              <a:t>10/20/25</a:t>
             </a:fld>
             <a:endParaRPr lang="en-US"/>
           </a:p>
@@ -1144,7 +1149,7 @@
           <a:p>
             <a:fld id="{DA65CD7A-DB9E-E745-8EE8-D0AEE8EA9938}" type="datetimeFigureOut">
               <a:rPr lang="en-US" smtClean="0"/>
-              <a:t>9/4/25</a:t>
+              <a:t>10/20/25</a:t>
             </a:fld>
             <a:endParaRPr lang="en-US"/>
           </a:p>
@@ -1314,7 +1319,7 @@
           <a:p>
             <a:fld id="{DA65CD7A-DB9E-E745-8EE8-D0AEE8EA9938}" type="datetimeFigureOut">
               <a:rPr lang="en-US" smtClean="0"/>
-              <a:t>9/4/25</a:t>
+              <a:t>10/20/25</a:t>
             </a:fld>
             <a:endParaRPr lang="en-US"/>
           </a:p>
@@ -1560,7 +1565,7 @@
           <a:p>
             <a:fld id="{DA65CD7A-DB9E-E745-8EE8-D0AEE8EA9938}" type="datetimeFigureOut">
               <a:rPr lang="en-US" smtClean="0"/>
-              <a:t>9/4/25</a:t>
+              <a:t>10/20/25</a:t>
             </a:fld>
             <a:endParaRPr lang="en-US"/>
           </a:p>
@@ -1792,7 +1797,7 @@
           <a:p>
             <a:fld id="{DA65CD7A-DB9E-E745-8EE8-D0AEE8EA9938}" type="datetimeFigureOut">
               <a:rPr lang="en-US" smtClean="0"/>
-              <a:t>9/4/25</a:t>
+              <a:t>10/20/25</a:t>
             </a:fld>
             <a:endParaRPr lang="en-US"/>
           </a:p>
@@ -2159,7 +2164,7 @@
           <a:p>
             <a:fld id="{DA65CD7A-DB9E-E745-8EE8-D0AEE8EA9938}" type="datetimeFigureOut">
               <a:rPr lang="en-US" smtClean="0"/>
-              <a:t>9/4/25</a:t>
+              <a:t>10/20/25</a:t>
             </a:fld>
             <a:endParaRPr lang="en-US"/>
           </a:p>
@@ -2277,7 +2282,7 @@
           <a:p>
             <a:fld id="{DA65CD7A-DB9E-E745-8EE8-D0AEE8EA9938}" type="datetimeFigureOut">
               <a:rPr lang="en-US" smtClean="0"/>
-              <a:t>9/4/25</a:t>
+              <a:t>10/20/25</a:t>
             </a:fld>
             <a:endParaRPr lang="en-US"/>
           </a:p>
@@ -2372,7 +2377,7 @@
           <a:p>
             <a:fld id="{DA65CD7A-DB9E-E745-8EE8-D0AEE8EA9938}" type="datetimeFigureOut">
               <a:rPr lang="en-US" smtClean="0"/>
-              <a:t>9/4/25</a:t>
+              <a:t>10/20/25</a:t>
             </a:fld>
             <a:endParaRPr lang="en-US"/>
           </a:p>
@@ -2649,7 +2654,7 @@
           <a:p>
             <a:fld id="{DA65CD7A-DB9E-E745-8EE8-D0AEE8EA9938}" type="datetimeFigureOut">
               <a:rPr lang="en-US" smtClean="0"/>
-              <a:t>9/4/25</a:t>
+              <a:t>10/20/25</a:t>
             </a:fld>
             <a:endParaRPr lang="en-US"/>
           </a:p>
@@ -2906,7 +2911,7 @@
           <a:p>
             <a:fld id="{DA65CD7A-DB9E-E745-8EE8-D0AEE8EA9938}" type="datetimeFigureOut">
               <a:rPr lang="en-US" smtClean="0"/>
-              <a:t>9/4/25</a:t>
+              <a:t>10/20/25</a:t>
             </a:fld>
             <a:endParaRPr lang="en-US"/>
           </a:p>
@@ -3119,7 +3124,7 @@
           <a:p>
             <a:fld id="{DA65CD7A-DB9E-E745-8EE8-D0AEE8EA9938}" type="datetimeFigureOut">
               <a:rPr lang="en-US" smtClean="0"/>
-              <a:t>9/4/25</a:t>
+              <a:t>10/20/25</a:t>
             </a:fld>
             <a:endParaRPr lang="en-US"/>
           </a:p>
@@ -3538,7 +3543,7 @@
         </p:nvSpPr>
         <p:spPr>
           <a:xfrm>
-            <a:off x="-1327759" y="563670"/>
+            <a:off x="-1544603" y="614657"/>
             <a:ext cx="15169015" cy="6726477"/>
           </a:xfrm>
           <a:prstGeom prst="rect">
@@ -3643,7 +3648,7 @@
         </p:blipFill>
         <p:spPr>
           <a:xfrm>
-            <a:off x="5829300" y="1631083"/>
+            <a:off x="7136830" y="1660367"/>
             <a:ext cx="533400" cy="330200"/>
           </a:xfrm>
           <a:prstGeom prst="rect">
@@ -3708,7 +3713,7 @@
         </p:nvCxnSpPr>
         <p:spPr>
           <a:xfrm>
-            <a:off x="6113926" y="883103"/>
+            <a:off x="7403530" y="881789"/>
             <a:ext cx="0" cy="796698"/>
           </a:xfrm>
           <a:prstGeom prst="straightConnector1">
@@ -3749,8 +3754,8 @@
         </p:nvCxnSpPr>
         <p:spPr>
           <a:xfrm>
-            <a:off x="9192378" y="881789"/>
-            <a:ext cx="0" cy="796698"/>
+            <a:off x="9210749" y="859003"/>
+            <a:ext cx="335330" cy="716172"/>
           </a:xfrm>
           <a:prstGeom prst="straightConnector1">
             <a:avLst/>
@@ -3831,7 +3836,7 @@
         </p:nvSpPr>
         <p:spPr>
           <a:xfrm>
-            <a:off x="4897908" y="2001638"/>
+            <a:off x="6150719" y="1977354"/>
             <a:ext cx="2505622" cy="646331"/>
           </a:xfrm>
           <a:prstGeom prst="rect">
@@ -3874,7 +3879,7 @@
         </p:nvSpPr>
         <p:spPr>
           <a:xfrm>
-            <a:off x="7938215" y="2001638"/>
+            <a:off x="8787538" y="2067021"/>
             <a:ext cx="2560317" cy="646331"/>
           </a:xfrm>
           <a:prstGeom prst="rect">
@@ -4888,55 +4893,14 @@
         </p:nvCxnSpPr>
         <p:spPr>
           <a:xfrm>
-            <a:off x="6193269" y="2746376"/>
-            <a:ext cx="28172" cy="2826655"/>
+            <a:off x="7590118" y="2756779"/>
+            <a:ext cx="0" cy="2908043"/>
           </a:xfrm>
           <a:prstGeom prst="straightConnector1">
             <a:avLst/>
           </a:prstGeom>
           <a:ln w="57150">
-            <a:tailEnd type="triangle"/>
-          </a:ln>
-        </p:spPr>
-        <p:style>
-          <a:lnRef idx="2">
-            <a:schemeClr val="dk1"/>
-          </a:lnRef>
-          <a:fillRef idx="0">
-            <a:schemeClr val="dk1"/>
-          </a:fillRef>
-          <a:effectRef idx="1">
-            <a:schemeClr val="dk1"/>
-          </a:effectRef>
-          <a:fontRef idx="minor">
-            <a:schemeClr val="tx1"/>
-          </a:fontRef>
-        </p:style>
-      </p:cxnSp>
-      <p:cxnSp>
-        <p:nvCxnSpPr>
-          <p:cNvPr id="61" name="Straight Arrow Connector 60">
-            <a:extLst>
-              <a:ext uri="{FF2B5EF4-FFF2-40B4-BE49-F238E27FC236}">
-                <a16:creationId xmlns:a16="http://schemas.microsoft.com/office/drawing/2014/main" id="{29442AFF-802D-18AA-20CD-02FB7EC91AA0}"/>
-              </a:ext>
-            </a:extLst>
-          </p:cNvPr>
-          <p:cNvCxnSpPr>
-            <a:cxnSpLocks/>
-          </p:cNvCxnSpPr>
-          <p:nvPr/>
-        </p:nvCxnSpPr>
-        <p:spPr>
-          <a:xfrm>
-            <a:off x="2408502" y="2674904"/>
-            <a:ext cx="0" cy="920066"/>
-          </a:xfrm>
-          <a:prstGeom prst="straightConnector1">
-            <a:avLst/>
-          </a:prstGeom>
-          <a:ln w="57150">
-            <a:tailEnd type="triangle"/>
+            <a:tailEnd type="none"/>
           </a:ln>
         </p:spPr>
         <p:style>
@@ -5092,7 +5056,7 @@
         </p:blipFill>
         <p:spPr>
           <a:xfrm>
-            <a:off x="8969197" y="1666777"/>
+            <a:off x="9378414" y="1687748"/>
             <a:ext cx="482600" cy="266700"/>
           </a:xfrm>
           <a:prstGeom prst="rect">
@@ -5310,6 +5274,136 @@
           </a:prstGeom>
         </p:spPr>
       </p:pic>
+      <p:cxnSp>
+        <p:nvCxnSpPr>
+          <p:cNvPr id="12" name="Straight Arrow Connector 11">
+            <a:extLst>
+              <a:ext uri="{FF2B5EF4-FFF2-40B4-BE49-F238E27FC236}">
+                <a16:creationId xmlns:a16="http://schemas.microsoft.com/office/drawing/2014/main" id="{AA5A0166-C41C-4FD2-41BA-49B5E7B1AEF1}"/>
+              </a:ext>
+            </a:extLst>
+          </p:cNvPr>
+          <p:cNvCxnSpPr>
+            <a:cxnSpLocks/>
+          </p:cNvCxnSpPr>
+          <p:nvPr/>
+        </p:nvCxnSpPr>
+        <p:spPr>
+          <a:xfrm>
+            <a:off x="2437374" y="2647969"/>
+            <a:ext cx="0" cy="1086555"/>
+          </a:xfrm>
+          <a:prstGeom prst="straightConnector1">
+            <a:avLst/>
+          </a:prstGeom>
+          <a:ln w="57150">
+            <a:tailEnd type="none"/>
+          </a:ln>
+        </p:spPr>
+        <p:style>
+          <a:lnRef idx="2">
+            <a:schemeClr val="dk1"/>
+          </a:lnRef>
+          <a:fillRef idx="0">
+            <a:schemeClr val="dk1"/>
+          </a:fillRef>
+          <a:effectRef idx="1">
+            <a:schemeClr val="dk1"/>
+          </a:effectRef>
+          <a:fontRef idx="minor">
+            <a:schemeClr val="tx1"/>
+          </a:fontRef>
+        </p:style>
+      </p:cxnSp>
+      <p:sp>
+        <p:nvSpPr>
+          <p:cNvPr id="18" name="Frame 17">
+            <a:extLst>
+              <a:ext uri="{FF2B5EF4-FFF2-40B4-BE49-F238E27FC236}">
+                <a16:creationId xmlns:a16="http://schemas.microsoft.com/office/drawing/2014/main" id="{7CA3C953-A8E8-2606-A756-1F53B18A1C53}"/>
+              </a:ext>
+            </a:extLst>
+          </p:cNvPr>
+          <p:cNvSpPr/>
+          <p:nvPr/>
+        </p:nvSpPr>
+        <p:spPr>
+          <a:xfrm>
+            <a:off x="-1222184" y="5261498"/>
+            <a:ext cx="3839972" cy="2294334"/>
+          </a:xfrm>
+          <a:prstGeom prst="frame">
+            <a:avLst>
+              <a:gd name="adj1" fmla="val 2012"/>
+            </a:avLst>
+          </a:prstGeom>
+          <a:ln w="12700"/>
+        </p:spPr>
+        <p:style>
+          <a:lnRef idx="2">
+            <a:schemeClr val="accent1">
+              <a:shade val="15000"/>
+            </a:schemeClr>
+          </a:lnRef>
+          <a:fillRef idx="1">
+            <a:schemeClr val="accent1"/>
+          </a:fillRef>
+          <a:effectRef idx="0">
+            <a:schemeClr val="accent1"/>
+          </a:effectRef>
+          <a:fontRef idx="minor">
+            <a:schemeClr val="lt1"/>
+          </a:fontRef>
+        </p:style>
+        <p:txBody>
+          <a:bodyPr rtlCol="0" anchor="ctr"/>
+          <a:lstStyle/>
+          <a:p>
+            <a:pPr algn="ctr"/>
+            <a:endParaRPr lang="en-US">
+              <a:solidFill>
+                <a:schemeClr val="tx1"/>
+              </a:solidFill>
+            </a:endParaRPr>
+          </a:p>
+        </p:txBody>
+      </p:sp>
+      <p:sp>
+        <p:nvSpPr>
+          <p:cNvPr id="20" name="TextBox 19">
+            <a:extLst>
+              <a:ext uri="{FF2B5EF4-FFF2-40B4-BE49-F238E27FC236}">
+                <a16:creationId xmlns:a16="http://schemas.microsoft.com/office/drawing/2014/main" id="{48DB0180-BF47-5F97-0657-9A83198A9C05}"/>
+              </a:ext>
+            </a:extLst>
+          </p:cNvPr>
+          <p:cNvSpPr txBox="1"/>
+          <p:nvPr/>
+        </p:nvSpPr>
+        <p:spPr>
+          <a:xfrm>
+            <a:off x="-357872" y="5268436"/>
+            <a:ext cx="2111347" cy="369332"/>
+          </a:xfrm>
+          <a:prstGeom prst="rect">
+            <a:avLst/>
+          </a:prstGeom>
+          <a:noFill/>
+        </p:spPr>
+        <p:txBody>
+          <a:bodyPr wrap="none" rtlCol="0">
+            <a:spAutoFit/>
+          </a:bodyPr>
+          <a:lstStyle/>
+          <a:p>
+            <a:r>
+              <a:rPr lang="en-US" dirty="0" err="1"/>
+              <a:t>Dorozsmai&amp;Toonen</a:t>
+            </a:r>
+            <a:endParaRPr lang="en-US" dirty="0"/>
+          </a:p>
+        </p:txBody>
+      </p:sp>
     </p:spTree>
     <p:extLst>
       <p:ext uri="{BB962C8B-B14F-4D97-AF65-F5344CB8AC3E}">

--- a/plottingCode/Fig1_schematic/formation_channels_legend.pptx
+++ b/plottingCode/Fig1_schematic/formation_channels_legend.pptx
@@ -209,7 +209,7 @@
           <a:p>
             <a:fld id="{BDAC1B45-61CC-B64D-BCEF-949BE053BD15}" type="datetimeFigureOut">
               <a:rPr lang="en-US" smtClean="0"/>
-              <a:t>10/20/25</a:t>
+              <a:t>10/29/25</a:t>
             </a:fld>
             <a:endParaRPr lang="en-US"/>
           </a:p>
@@ -799,7 +799,7 @@
           <a:p>
             <a:fld id="{DA65CD7A-DB9E-E745-8EE8-D0AEE8EA9938}" type="datetimeFigureOut">
               <a:rPr lang="en-US" smtClean="0"/>
-              <a:t>10/20/25</a:t>
+              <a:t>10/29/25</a:t>
             </a:fld>
             <a:endParaRPr lang="en-US"/>
           </a:p>
@@ -969,7 +969,7 @@
           <a:p>
             <a:fld id="{DA65CD7A-DB9E-E745-8EE8-D0AEE8EA9938}" type="datetimeFigureOut">
               <a:rPr lang="en-US" smtClean="0"/>
-              <a:t>10/20/25</a:t>
+              <a:t>10/29/25</a:t>
             </a:fld>
             <a:endParaRPr lang="en-US"/>
           </a:p>
@@ -1149,7 +1149,7 @@
           <a:p>
             <a:fld id="{DA65CD7A-DB9E-E745-8EE8-D0AEE8EA9938}" type="datetimeFigureOut">
               <a:rPr lang="en-US" smtClean="0"/>
-              <a:t>10/20/25</a:t>
+              <a:t>10/29/25</a:t>
             </a:fld>
             <a:endParaRPr lang="en-US"/>
           </a:p>
@@ -1319,7 +1319,7 @@
           <a:p>
             <a:fld id="{DA65CD7A-DB9E-E745-8EE8-D0AEE8EA9938}" type="datetimeFigureOut">
               <a:rPr lang="en-US" smtClean="0"/>
-              <a:t>10/20/25</a:t>
+              <a:t>10/29/25</a:t>
             </a:fld>
             <a:endParaRPr lang="en-US"/>
           </a:p>
@@ -1565,7 +1565,7 @@
           <a:p>
             <a:fld id="{DA65CD7A-DB9E-E745-8EE8-D0AEE8EA9938}" type="datetimeFigureOut">
               <a:rPr lang="en-US" smtClean="0"/>
-              <a:t>10/20/25</a:t>
+              <a:t>10/29/25</a:t>
             </a:fld>
             <a:endParaRPr lang="en-US"/>
           </a:p>
@@ -1797,7 +1797,7 @@
           <a:p>
             <a:fld id="{DA65CD7A-DB9E-E745-8EE8-D0AEE8EA9938}" type="datetimeFigureOut">
               <a:rPr lang="en-US" smtClean="0"/>
-              <a:t>10/20/25</a:t>
+              <a:t>10/29/25</a:t>
             </a:fld>
             <a:endParaRPr lang="en-US"/>
           </a:p>
@@ -2164,7 +2164,7 @@
           <a:p>
             <a:fld id="{DA65CD7A-DB9E-E745-8EE8-D0AEE8EA9938}" type="datetimeFigureOut">
               <a:rPr lang="en-US" smtClean="0"/>
-              <a:t>10/20/25</a:t>
+              <a:t>10/29/25</a:t>
             </a:fld>
             <a:endParaRPr lang="en-US"/>
           </a:p>
@@ -2282,7 +2282,7 @@
           <a:p>
             <a:fld id="{DA65CD7A-DB9E-E745-8EE8-D0AEE8EA9938}" type="datetimeFigureOut">
               <a:rPr lang="en-US" smtClean="0"/>
-              <a:t>10/20/25</a:t>
+              <a:t>10/29/25</a:t>
             </a:fld>
             <a:endParaRPr lang="en-US"/>
           </a:p>
@@ -2377,7 +2377,7 @@
           <a:p>
             <a:fld id="{DA65CD7A-DB9E-E745-8EE8-D0AEE8EA9938}" type="datetimeFigureOut">
               <a:rPr lang="en-US" smtClean="0"/>
-              <a:t>10/20/25</a:t>
+              <a:t>10/29/25</a:t>
             </a:fld>
             <a:endParaRPr lang="en-US"/>
           </a:p>
@@ -2654,7 +2654,7 @@
           <a:p>
             <a:fld id="{DA65CD7A-DB9E-E745-8EE8-D0AEE8EA9938}" type="datetimeFigureOut">
               <a:rPr lang="en-US" smtClean="0"/>
-              <a:t>10/20/25</a:t>
+              <a:t>10/29/25</a:t>
             </a:fld>
             <a:endParaRPr lang="en-US"/>
           </a:p>
@@ -2911,7 +2911,7 @@
           <a:p>
             <a:fld id="{DA65CD7A-DB9E-E745-8EE8-D0AEE8EA9938}" type="datetimeFigureOut">
               <a:rPr lang="en-US" smtClean="0"/>
-              <a:t>10/20/25</a:t>
+              <a:t>10/29/25</a:t>
             </a:fld>
             <a:endParaRPr lang="en-US"/>
           </a:p>
@@ -3124,7 +3124,7 @@
           <a:p>
             <a:fld id="{DA65CD7A-DB9E-E745-8EE8-D0AEE8EA9938}" type="datetimeFigureOut">
               <a:rPr lang="en-US" smtClean="0"/>
-              <a:t>10/20/25</a:t>
+              <a:t>10/29/25</a:t>
             </a:fld>
             <a:endParaRPr lang="en-US"/>
           </a:p>
@@ -3544,7 +3544,7 @@
         <p:spPr>
           <a:xfrm>
             <a:off x="-1544603" y="614657"/>
-            <a:ext cx="15169015" cy="6726477"/>
+            <a:ext cx="15254065" cy="7018595"/>
           </a:xfrm>
           <a:prstGeom prst="rect">
             <a:avLst/>
@@ -3597,8 +3597,8 @@
         </p:nvSpPr>
         <p:spPr>
           <a:xfrm>
-            <a:off x="10229233" y="6482283"/>
-            <a:ext cx="1693156" cy="646331"/>
+            <a:off x="10238051" y="6482283"/>
+            <a:ext cx="1675522" cy="923330"/>
           </a:xfrm>
           <a:prstGeom prst="rect">
             <a:avLst/>
@@ -3612,6 +3612,13 @@
           <a:lstStyle/>
           <a:p>
             <a:pPr algn="ctr"/>
+            <a:r>
+              <a:rPr lang="en-US" dirty="0"/>
+              <a:t>(CE3) </a:t>
+            </a:r>
+            <a:br>
+              <a:rPr lang="en-US" dirty="0"/>
+            </a:br>
             <a:r>
               <a:rPr lang="en-US" dirty="0"/>
               <a:t>single-core CE </a:t>
@@ -3648,7 +3655,7 @@
         </p:blipFill>
         <p:spPr>
           <a:xfrm>
-            <a:off x="7136830" y="1660367"/>
+            <a:off x="7906155" y="1705071"/>
             <a:ext cx="533400" cy="330200"/>
           </a:xfrm>
           <a:prstGeom prst="rect">
@@ -3697,12 +3704,128 @@
           </a:fontRef>
         </p:style>
       </p:cxnSp>
+      <p:sp>
+        <p:nvSpPr>
+          <p:cNvPr id="9" name="TextBox 8">
+            <a:extLst>
+              <a:ext uri="{FF2B5EF4-FFF2-40B4-BE49-F238E27FC236}">
+                <a16:creationId xmlns:a16="http://schemas.microsoft.com/office/drawing/2014/main" id="{681AA600-B588-9411-B633-33379041B25D}"/>
+              </a:ext>
+            </a:extLst>
+          </p:cNvPr>
+          <p:cNvSpPr txBox="1"/>
+          <p:nvPr/>
+        </p:nvSpPr>
+        <p:spPr>
+          <a:xfrm>
+            <a:off x="1204422" y="1978603"/>
+            <a:ext cx="2553904" cy="369332"/>
+          </a:xfrm>
+          <a:prstGeom prst="rect">
+            <a:avLst/>
+          </a:prstGeom>
+          <a:noFill/>
+        </p:spPr>
+        <p:txBody>
+          <a:bodyPr wrap="none" rtlCol="0">
+            <a:spAutoFit/>
+          </a:bodyPr>
+          <a:lstStyle/>
+          <a:p>
+            <a:pPr algn="ctr"/>
+            <a:r>
+              <a:rPr lang="en-US" dirty="0"/>
+              <a:t>(</a:t>
+            </a:r>
+            <a:r>
+              <a:rPr lang="en-US" dirty="0" err="1"/>
+              <a:t>noCE</a:t>
+            </a:r>
+            <a:r>
+              <a:rPr lang="en-US" dirty="0"/>
+              <a:t>)  no CE  channels</a:t>
+            </a:r>
+          </a:p>
+        </p:txBody>
+      </p:sp>
+      <p:sp>
+        <p:nvSpPr>
+          <p:cNvPr id="10" name="TextBox 9">
+            <a:extLst>
+              <a:ext uri="{FF2B5EF4-FFF2-40B4-BE49-F238E27FC236}">
+                <a16:creationId xmlns:a16="http://schemas.microsoft.com/office/drawing/2014/main" id="{ED830803-0097-3FCF-6EB9-15EC2434998D}"/>
+              </a:ext>
+            </a:extLst>
+          </p:cNvPr>
+          <p:cNvSpPr txBox="1"/>
+          <p:nvPr/>
+        </p:nvSpPr>
+        <p:spPr>
+          <a:xfrm>
+            <a:off x="7209195" y="1978843"/>
+            <a:ext cx="1954381" cy="369332"/>
+          </a:xfrm>
+          <a:prstGeom prst="rect">
+            <a:avLst/>
+          </a:prstGeom>
+          <a:noFill/>
+        </p:spPr>
+        <p:txBody>
+          <a:bodyPr wrap="none" rtlCol="0">
+            <a:spAutoFit/>
+          </a:bodyPr>
+          <a:lstStyle/>
+          <a:p>
+            <a:pPr algn="ctr"/>
+            <a:r>
+              <a:rPr lang="en-US" dirty="0"/>
+              <a:t>(CE)  CE channels</a:t>
+            </a:r>
+          </a:p>
+        </p:txBody>
+      </p:sp>
+      <p:sp>
+        <p:nvSpPr>
+          <p:cNvPr id="11" name="TextBox 10">
+            <a:extLst>
+              <a:ext uri="{FF2B5EF4-FFF2-40B4-BE49-F238E27FC236}">
+                <a16:creationId xmlns:a16="http://schemas.microsoft.com/office/drawing/2014/main" id="{C7E1F36F-4AE9-C95C-D439-1166B8540D4E}"/>
+              </a:ext>
+            </a:extLst>
+          </p:cNvPr>
+          <p:cNvSpPr txBox="1"/>
+          <p:nvPr/>
+        </p:nvSpPr>
+        <p:spPr>
+          <a:xfrm>
+            <a:off x="4952505" y="1938962"/>
+            <a:ext cx="1146468" cy="369332"/>
+          </a:xfrm>
+          <a:prstGeom prst="rect">
+            <a:avLst/>
+          </a:prstGeom>
+          <a:noFill/>
+        </p:spPr>
+        <p:txBody>
+          <a:bodyPr wrap="none" rtlCol="0">
+            <a:spAutoFit/>
+          </a:bodyPr>
+          <a:lstStyle/>
+          <a:p>
+            <a:pPr algn="ctr"/>
+            <a:r>
+              <a:rPr lang="en-US" dirty="0"/>
+              <a:t>(O)  other </a:t>
+            </a:r>
+          </a:p>
+        </p:txBody>
+      </p:sp>
       <p:cxnSp>
         <p:nvCxnSpPr>
-          <p:cNvPr id="7" name="Straight Arrow Connector 6">
-            <a:extLst>
-              <a:ext uri="{FF2B5EF4-FFF2-40B4-BE49-F238E27FC236}">
-                <a16:creationId xmlns:a16="http://schemas.microsoft.com/office/drawing/2014/main" id="{D77A6D3B-92FB-F58A-79AD-D177DE38663F}"/>
+          <p:cNvPr id="13" name="Elbow Connector 12">
+            <a:extLst>
+              <a:ext uri="{FF2B5EF4-FFF2-40B4-BE49-F238E27FC236}">
+                <a16:creationId xmlns:a16="http://schemas.microsoft.com/office/drawing/2014/main" id="{403B377E-E057-80A4-9CC3-F0F2F8706706}"/>
               </a:ext>
             </a:extLst>
           </p:cNvPr>
@@ -3712,219 +3835,8 @@
           <p:nvPr/>
         </p:nvCxnSpPr>
         <p:spPr>
-          <a:xfrm>
-            <a:off x="7403530" y="881789"/>
-            <a:ext cx="0" cy="796698"/>
-          </a:xfrm>
-          <a:prstGeom prst="straightConnector1">
-            <a:avLst/>
-          </a:prstGeom>
-          <a:ln w="57150">
-            <a:tailEnd type="triangle"/>
-          </a:ln>
-        </p:spPr>
-        <p:style>
-          <a:lnRef idx="2">
-            <a:schemeClr val="dk1"/>
-          </a:lnRef>
-          <a:fillRef idx="0">
-            <a:schemeClr val="dk1"/>
-          </a:fillRef>
-          <a:effectRef idx="1">
-            <a:schemeClr val="dk1"/>
-          </a:effectRef>
-          <a:fontRef idx="minor">
-            <a:schemeClr val="tx1"/>
-          </a:fontRef>
-        </p:style>
-      </p:cxnSp>
-      <p:cxnSp>
-        <p:nvCxnSpPr>
-          <p:cNvPr id="8" name="Straight Arrow Connector 7">
-            <a:extLst>
-              <a:ext uri="{FF2B5EF4-FFF2-40B4-BE49-F238E27FC236}">
-                <a16:creationId xmlns:a16="http://schemas.microsoft.com/office/drawing/2014/main" id="{6CB25869-8FD9-A37A-A6DF-5807DA4B474B}"/>
-              </a:ext>
-            </a:extLst>
-          </p:cNvPr>
-          <p:cNvCxnSpPr>
-            <a:cxnSpLocks/>
-          </p:cNvCxnSpPr>
-          <p:nvPr/>
-        </p:nvCxnSpPr>
-        <p:spPr>
-          <a:xfrm>
-            <a:off x="9210749" y="859003"/>
-            <a:ext cx="335330" cy="716172"/>
-          </a:xfrm>
-          <a:prstGeom prst="straightConnector1">
-            <a:avLst/>
-          </a:prstGeom>
-          <a:ln w="57150">
-            <a:tailEnd type="triangle"/>
-          </a:ln>
-        </p:spPr>
-        <p:style>
-          <a:lnRef idx="2">
-            <a:schemeClr val="dk1"/>
-          </a:lnRef>
-          <a:fillRef idx="0">
-            <a:schemeClr val="dk1"/>
-          </a:fillRef>
-          <a:effectRef idx="1">
-            <a:schemeClr val="dk1"/>
-          </a:effectRef>
-          <a:fontRef idx="minor">
-            <a:schemeClr val="tx1"/>
-          </a:fontRef>
-        </p:style>
-      </p:cxnSp>
-      <p:sp>
-        <p:nvSpPr>
-          <p:cNvPr id="9" name="TextBox 8">
-            <a:extLst>
-              <a:ext uri="{FF2B5EF4-FFF2-40B4-BE49-F238E27FC236}">
-                <a16:creationId xmlns:a16="http://schemas.microsoft.com/office/drawing/2014/main" id="{681AA600-B588-9411-B633-33379041B25D}"/>
-              </a:ext>
-            </a:extLst>
-          </p:cNvPr>
-          <p:cNvSpPr txBox="1"/>
-          <p:nvPr/>
-        </p:nvSpPr>
-        <p:spPr>
-          <a:xfrm>
-            <a:off x="1306171" y="2001638"/>
-            <a:ext cx="2335704" cy="646331"/>
-          </a:xfrm>
-          <a:prstGeom prst="rect">
-            <a:avLst/>
-          </a:prstGeom>
-          <a:noFill/>
-        </p:spPr>
-        <p:txBody>
-          <a:bodyPr wrap="none" rtlCol="0">
-            <a:spAutoFit/>
-          </a:bodyPr>
-          <a:lstStyle/>
-          <a:p>
-            <a:pPr algn="ctr"/>
-            <a:r>
-              <a:rPr lang="en-US" dirty="0"/>
-              <a:t>no common envelope</a:t>
-            </a:r>
-          </a:p>
-          <a:p>
-            <a:pPr algn="ctr"/>
-            <a:r>
-              <a:rPr lang="en-US" dirty="0"/>
-              <a:t>channels</a:t>
-            </a:r>
-          </a:p>
-        </p:txBody>
-      </p:sp>
-      <p:sp>
-        <p:nvSpPr>
-          <p:cNvPr id="10" name="TextBox 9">
-            <a:extLst>
-              <a:ext uri="{FF2B5EF4-FFF2-40B4-BE49-F238E27FC236}">
-                <a16:creationId xmlns:a16="http://schemas.microsoft.com/office/drawing/2014/main" id="{ED830803-0097-3FCF-6EB9-15EC2434998D}"/>
-              </a:ext>
-            </a:extLst>
-          </p:cNvPr>
-          <p:cNvSpPr txBox="1"/>
-          <p:nvPr/>
-        </p:nvSpPr>
-        <p:spPr>
-          <a:xfrm>
-            <a:off x="6150719" y="1977354"/>
-            <a:ext cx="2505622" cy="646331"/>
-          </a:xfrm>
-          <a:prstGeom prst="rect">
-            <a:avLst/>
-          </a:prstGeom>
-          <a:noFill/>
-        </p:spPr>
-        <p:txBody>
-          <a:bodyPr wrap="none" rtlCol="0">
-            <a:spAutoFit/>
-          </a:bodyPr>
-          <a:lstStyle/>
-          <a:p>
-            <a:pPr algn="ctr"/>
-            <a:r>
-              <a:rPr lang="en-US" dirty="0"/>
-              <a:t>common envelope (CE)</a:t>
-            </a:r>
-          </a:p>
-          <a:p>
-            <a:pPr algn="ctr"/>
-            <a:r>
-              <a:rPr lang="en-US" dirty="0"/>
-              <a:t>channels</a:t>
-            </a:r>
-          </a:p>
-        </p:txBody>
-      </p:sp>
-      <p:sp>
-        <p:nvSpPr>
-          <p:cNvPr id="11" name="TextBox 10">
-            <a:extLst>
-              <a:ext uri="{FF2B5EF4-FFF2-40B4-BE49-F238E27FC236}">
-                <a16:creationId xmlns:a16="http://schemas.microsoft.com/office/drawing/2014/main" id="{C7E1F36F-4AE9-C95C-D439-1166B8540D4E}"/>
-              </a:ext>
-            </a:extLst>
-          </p:cNvPr>
-          <p:cNvSpPr txBox="1"/>
-          <p:nvPr/>
-        </p:nvSpPr>
-        <p:spPr>
-          <a:xfrm>
-            <a:off x="8787538" y="2067021"/>
-            <a:ext cx="2560317" cy="646331"/>
-          </a:xfrm>
-          <a:prstGeom prst="rect">
-            <a:avLst/>
-          </a:prstGeom>
-          <a:noFill/>
-        </p:spPr>
-        <p:txBody>
-          <a:bodyPr wrap="none" rtlCol="0">
-            <a:spAutoFit/>
-          </a:bodyPr>
-          <a:lstStyle/>
-          <a:p>
-            <a:pPr algn="ctr"/>
-            <a:r>
-              <a:rPr lang="en-US" dirty="0"/>
-              <a:t>other (CE not specified)</a:t>
-            </a:r>
-          </a:p>
-          <a:p>
-            <a:pPr algn="ctr"/>
-            <a:r>
-              <a:rPr lang="en-US" dirty="0"/>
-              <a:t>channels</a:t>
-            </a:r>
-          </a:p>
-        </p:txBody>
-      </p:sp>
-      <p:cxnSp>
-        <p:nvCxnSpPr>
-          <p:cNvPr id="13" name="Elbow Connector 12">
-            <a:extLst>
-              <a:ext uri="{FF2B5EF4-FFF2-40B4-BE49-F238E27FC236}">
-                <a16:creationId xmlns:a16="http://schemas.microsoft.com/office/drawing/2014/main" id="{403B377E-E057-80A4-9CC3-F0F2F8706706}"/>
-              </a:ext>
-            </a:extLst>
-          </p:cNvPr>
-          <p:cNvCxnSpPr>
-            <a:cxnSpLocks/>
-          </p:cNvCxnSpPr>
-          <p:nvPr/>
-        </p:nvCxnSpPr>
-        <p:spPr>
           <a:xfrm rot="10800000" flipV="1">
-            <a:off x="-320174" y="3734524"/>
+            <a:off x="-320174" y="3356838"/>
             <a:ext cx="1919986" cy="486745"/>
           </a:xfrm>
           <a:prstGeom prst="bentConnector3">
@@ -4008,8 +3920,8 @@
         </p:nvCxnSpPr>
         <p:spPr>
           <a:xfrm>
-            <a:off x="2408502" y="850532"/>
-            <a:ext cx="6783876" cy="16942"/>
+            <a:off x="2388624" y="850532"/>
+            <a:ext cx="5826708" cy="40336"/>
           </a:xfrm>
           <a:prstGeom prst="line">
             <a:avLst/>
@@ -4045,8 +3957,8 @@
         </p:nvSpPr>
         <p:spPr>
           <a:xfrm>
-            <a:off x="-1222184" y="4615167"/>
-            <a:ext cx="1804020" cy="646331"/>
+            <a:off x="-1165176" y="4337640"/>
+            <a:ext cx="1804019" cy="923330"/>
           </a:xfrm>
           <a:prstGeom prst="rect">
             <a:avLst/>
@@ -4062,6 +3974,13 @@
             <a:pPr algn="ctr"/>
             <a:r>
               <a:rPr lang="en-US" dirty="0"/>
+              <a:t>(noCE1) </a:t>
+            </a:r>
+            <a:br>
+              <a:rPr lang="en-US" dirty="0"/>
+            </a:br>
+            <a:r>
+              <a:rPr lang="en-US" dirty="0"/>
               <a:t>SMT before SN1 </a:t>
             </a:r>
             <a:br>
@@ -4088,8 +4007,8 @@
         </p:nvSpPr>
         <p:spPr>
           <a:xfrm>
-            <a:off x="4940352" y="4587415"/>
-            <a:ext cx="772969" cy="646331"/>
+            <a:off x="4608218" y="4346108"/>
+            <a:ext cx="1393330" cy="646331"/>
           </a:xfrm>
           <a:prstGeom prst="rect">
             <a:avLst/>
@@ -4105,14 +4024,22 @@
             <a:pPr algn="ctr"/>
             <a:r>
               <a:rPr lang="en-US" dirty="0"/>
-              <a:t>other </a:t>
+              <a:t>(</a:t>
+            </a:r>
+            <a:r>
+              <a:rPr lang="en-US" dirty="0" err="1"/>
+              <a:t>noCEO</a:t>
+            </a:r>
+            <a:r>
+              <a:rPr lang="en-US" dirty="0"/>
+              <a:t>) </a:t>
             </a:r>
             <a:br>
               <a:rPr lang="en-US" dirty="0"/>
             </a:br>
             <a:r>
               <a:rPr lang="en-US" dirty="0"/>
-              <a:t>no CE</a:t>
+              <a:t>other  no CE</a:t>
             </a:r>
           </a:p>
         </p:txBody>
@@ -4131,8 +4058,8 @@
         </p:nvSpPr>
         <p:spPr>
           <a:xfrm>
-            <a:off x="597332" y="4601291"/>
-            <a:ext cx="1884042" cy="646331"/>
+            <a:off x="581919" y="4320360"/>
+            <a:ext cx="1884041" cy="923330"/>
           </a:xfrm>
           <a:prstGeom prst="rect">
             <a:avLst/>
@@ -4148,6 +4075,13 @@
             <a:pPr algn="ctr"/>
             <a:r>
               <a:rPr lang="en-US" dirty="0"/>
+              <a:t> (noCE2) </a:t>
+            </a:r>
+            <a:br>
+              <a:rPr lang="en-US" dirty="0"/>
+            </a:br>
+            <a:r>
+              <a:rPr lang="en-US" dirty="0"/>
               <a:t>SMT before SN1</a:t>
             </a:r>
           </a:p>
@@ -4174,8 +4108,8 @@
         </p:nvSpPr>
         <p:spPr>
           <a:xfrm>
-            <a:off x="2429610" y="4594353"/>
-            <a:ext cx="2180376" cy="646331"/>
+            <a:off x="2561706" y="4318054"/>
+            <a:ext cx="2180376" cy="923330"/>
           </a:xfrm>
           <a:prstGeom prst="rect">
             <a:avLst/>
@@ -4191,7 +4125,14 @@
             <a:pPr algn="ctr"/>
             <a:r>
               <a:rPr lang="en-US" dirty="0"/>
-              <a:t>no SMT before SN1 </a:t>
+              <a:t>(noCE3) </a:t>
+            </a:r>
+            <a:br>
+              <a:rPr lang="en-US" dirty="0"/>
+            </a:br>
+            <a:r>
+              <a:rPr lang="en-US" dirty="0"/>
+              <a:t>SMT before SN1 </a:t>
             </a:r>
             <a:br>
               <a:rPr lang="en-US" dirty="0"/>
@@ -4219,7 +4160,7 @@
         </p:nvCxnSpPr>
         <p:spPr>
           <a:xfrm rot="10800000" flipV="1">
-            <a:off x="1599812" y="3734524"/>
+            <a:off x="1599812" y="3356838"/>
             <a:ext cx="1919986" cy="486745"/>
           </a:xfrm>
           <a:prstGeom prst="bentConnector3">
@@ -4262,7 +4203,7 @@
         </p:nvCxnSpPr>
         <p:spPr>
           <a:xfrm rot="10800000" flipH="1" flipV="1">
-            <a:off x="1466436" y="3734524"/>
+            <a:off x="1737625" y="3356838"/>
             <a:ext cx="1919986" cy="486745"/>
           </a:xfrm>
           <a:prstGeom prst="bentConnector3">
@@ -4305,7 +4246,7 @@
         </p:nvCxnSpPr>
         <p:spPr>
           <a:xfrm rot="10800000" flipH="1" flipV="1">
-            <a:off x="3386422" y="3734524"/>
+            <a:off x="3355493" y="3356838"/>
             <a:ext cx="1919986" cy="486745"/>
           </a:xfrm>
           <a:prstGeom prst="bentConnector3">
@@ -4389,8 +4330,8 @@
         </p:nvSpPr>
         <p:spPr>
           <a:xfrm>
-            <a:off x="2617788" y="6411917"/>
-            <a:ext cx="1804020" cy="646331"/>
+            <a:off x="2617790" y="6411917"/>
+            <a:ext cx="1804019" cy="923330"/>
           </a:xfrm>
           <a:prstGeom prst="rect">
             <a:avLst/>
@@ -4406,6 +4347,13 @@
             <a:pPr algn="ctr"/>
             <a:r>
               <a:rPr lang="en-US" dirty="0"/>
+              <a:t>(CE1) </a:t>
+            </a:r>
+            <a:br>
+              <a:rPr lang="en-US" dirty="0"/>
+            </a:br>
+            <a:r>
+              <a:rPr lang="en-US" dirty="0"/>
               <a:t>SMT before SN1 </a:t>
             </a:r>
             <a:br>
@@ -4432,8 +4380,8 @@
         </p:nvSpPr>
         <p:spPr>
           <a:xfrm>
-            <a:off x="8787538" y="6384165"/>
-            <a:ext cx="758541" cy="646331"/>
+            <a:off x="8756601" y="6384165"/>
+            <a:ext cx="820417" cy="923330"/>
           </a:xfrm>
           <a:prstGeom prst="rect">
             <a:avLst/>
@@ -4449,6 +4397,13 @@
             <a:pPr algn="ctr"/>
             <a:r>
               <a:rPr lang="en-US" dirty="0"/>
+              <a:t>(CEO) </a:t>
+            </a:r>
+            <a:br>
+              <a:rPr lang="en-US" dirty="0"/>
+            </a:br>
+            <a:r>
+              <a:rPr lang="en-US" dirty="0"/>
               <a:t>other </a:t>
             </a:r>
             <a:br>
@@ -4475,8 +4430,8 @@
         </p:nvSpPr>
         <p:spPr>
           <a:xfrm>
-            <a:off x="4555991" y="6398041"/>
-            <a:ext cx="1646669" cy="646331"/>
+            <a:off x="4653906" y="6398741"/>
+            <a:ext cx="1646668" cy="923330"/>
           </a:xfrm>
           <a:prstGeom prst="rect">
             <a:avLst/>
@@ -4492,6 +4447,13 @@
             <a:pPr algn="ctr"/>
             <a:r>
               <a:rPr lang="en-US" dirty="0"/>
+              <a:t>(CE5) </a:t>
+            </a:r>
+            <a:br>
+              <a:rPr lang="en-US" dirty="0"/>
+            </a:br>
+            <a:r>
+              <a:rPr lang="en-US" dirty="0"/>
               <a:t>CE before SN1</a:t>
             </a:r>
           </a:p>
@@ -4519,7 +4481,7 @@
         <p:spPr>
           <a:xfrm>
             <a:off x="6269582" y="6391103"/>
-            <a:ext cx="2180376" cy="646331"/>
+            <a:ext cx="2180376" cy="923330"/>
           </a:xfrm>
           <a:prstGeom prst="rect">
             <a:avLst/>
@@ -4535,6 +4497,13 @@
             <a:pPr algn="ctr"/>
             <a:r>
               <a:rPr lang="en-US" dirty="0"/>
+              <a:t>(CE4) </a:t>
+            </a:r>
+          </a:p>
+          <a:p>
+            <a:pPr algn="ctr"/>
+            <a:r>
+              <a:rPr lang="en-US" dirty="0"/>
               <a:t>no SMT before SN1 </a:t>
             </a:r>
             <a:br>
@@ -4542,7 +4511,7 @@
             </a:br>
             <a:r>
               <a:rPr lang="en-US" dirty="0"/>
-              <a:t>SMT after SN1</a:t>
+              <a:t>CE after SN1</a:t>
             </a:r>
           </a:p>
         </p:txBody>
@@ -4776,8 +4745,8 @@
         </p:nvSpPr>
         <p:spPr>
           <a:xfrm>
-            <a:off x="650765" y="6539265"/>
-            <a:ext cx="1631345" cy="369332"/>
+            <a:off x="670002" y="6539265"/>
+            <a:ext cx="1592872" cy="646331"/>
           </a:xfrm>
           <a:prstGeom prst="rect">
             <a:avLst/>
@@ -4791,6 +4760,13 @@
           <a:lstStyle/>
           <a:p>
             <a:pPr algn="ctr"/>
+            <a:r>
+              <a:rPr lang="en-US" dirty="0"/>
+              <a:t> (CE7) </a:t>
+            </a:r>
+            <a:br>
+              <a:rPr lang="en-US" dirty="0"/>
+            </a:br>
             <a:r>
               <a:rPr lang="en-US" dirty="0"/>
               <a:t>convective CE</a:t>
@@ -4855,8 +4831,8 @@
         </p:nvSpPr>
         <p:spPr>
           <a:xfrm>
-            <a:off x="-920470" y="6553464"/>
-            <a:ext cx="1372555" cy="369332"/>
+            <a:off x="-920468" y="6553464"/>
+            <a:ext cx="1372555" cy="646331"/>
           </a:xfrm>
           <a:prstGeom prst="rect">
             <a:avLst/>
@@ -4872,6 +4848,13 @@
             <a:pPr algn="ctr"/>
             <a:r>
               <a:rPr lang="en-US" dirty="0"/>
+              <a:t>(CE6) </a:t>
+            </a:r>
+            <a:br>
+              <a:rPr lang="en-US" dirty="0"/>
+            </a:br>
+            <a:r>
+              <a:rPr lang="en-US" dirty="0"/>
               <a:t>radiative CE</a:t>
             </a:r>
           </a:p>
@@ -4893,8 +4876,8 @@
         </p:nvCxnSpPr>
         <p:spPr>
           <a:xfrm>
-            <a:off x="7590118" y="2756779"/>
-            <a:ext cx="0" cy="2908043"/>
+            <a:off x="8235210" y="2482615"/>
+            <a:ext cx="0" cy="3182207"/>
           </a:xfrm>
           <a:prstGeom prst="straightConnector1">
             <a:avLst/>
@@ -4932,8 +4915,8 @@
         </p:nvSpPr>
         <p:spPr>
           <a:xfrm>
-            <a:off x="11874611" y="6427272"/>
-            <a:ext cx="1784527" cy="646331"/>
+            <a:off x="11924942" y="6482283"/>
+            <a:ext cx="1784527" cy="923330"/>
           </a:xfrm>
           <a:prstGeom prst="rect">
             <a:avLst/>
@@ -4947,6 +4930,13 @@
           <a:lstStyle/>
           <a:p>
             <a:pPr algn="ctr"/>
+            <a:r>
+              <a:rPr lang="en-US" dirty="0"/>
+              <a:t> (CE2) </a:t>
+            </a:r>
+            <a:br>
+              <a:rPr lang="en-US" dirty="0"/>
+            </a:br>
             <a:r>
               <a:rPr lang="en-US" dirty="0"/>
               <a:t>double-core CE </a:t>
@@ -5026,7 +5016,7 @@
         </p:blipFill>
         <p:spPr>
           <a:xfrm>
-            <a:off x="2166078" y="1606786"/>
+            <a:off x="2148152" y="1725202"/>
             <a:ext cx="520700" cy="266700"/>
           </a:xfrm>
           <a:prstGeom prst="rect">
@@ -5056,7 +5046,7 @@
         </p:blipFill>
         <p:spPr>
           <a:xfrm>
-            <a:off x="9378414" y="1687748"/>
+            <a:off x="5273703" y="1670912"/>
             <a:ext cx="482600" cy="266700"/>
           </a:xfrm>
           <a:prstGeom prst="rect">
@@ -5236,7 +5226,7 @@
         </p:blipFill>
         <p:spPr>
           <a:xfrm>
-            <a:off x="5073681" y="4349421"/>
+            <a:off x="5073681" y="3971735"/>
             <a:ext cx="539033" cy="291369"/>
           </a:xfrm>
           <a:prstGeom prst="rect">
@@ -5290,7 +5280,7 @@
         </p:nvCxnSpPr>
         <p:spPr>
           <a:xfrm>
-            <a:off x="2437374" y="2647969"/>
+            <a:off x="2455246" y="2536143"/>
             <a:ext cx="0" cy="1086555"/>
           </a:xfrm>
           <a:prstGeom prst="straightConnector1">
@@ -5329,15 +5319,15 @@
         </p:nvSpPr>
         <p:spPr>
           <a:xfrm>
-            <a:off x="-1222184" y="5261498"/>
+            <a:off x="-639333" y="9226477"/>
             <a:ext cx="3839972" cy="2294334"/>
           </a:xfrm>
           <a:prstGeom prst="frame">
             <a:avLst>
-              <a:gd name="adj1" fmla="val 2012"/>
+              <a:gd name="adj1" fmla="val 0"/>
             </a:avLst>
           </a:prstGeom>
-          <a:ln w="12700"/>
+          <a:ln w="9525"/>
         </p:spPr>
         <p:style>
           <a:lnRef idx="2">
@@ -5382,8 +5372,8 @@
         </p:nvSpPr>
         <p:spPr>
           <a:xfrm>
-            <a:off x="-357872" y="5268436"/>
-            <a:ext cx="2111347" cy="369332"/>
+            <a:off x="-324111" y="5360061"/>
+            <a:ext cx="1770998" cy="307777"/>
           </a:xfrm>
           <a:prstGeom prst="rect">
             <a:avLst/>
@@ -5397,10 +5387,280 @@
           <a:lstStyle/>
           <a:p>
             <a:r>
-              <a:rPr lang="en-US" dirty="0" err="1"/>
-              <a:t>Dorozsmai&amp;Toonen</a:t>
-            </a:r>
+              <a:rPr lang="en-US" sz="1400" dirty="0" err="1"/>
+              <a:t>Dorozsmai</a:t>
+            </a:r>
+            <a:r>
+              <a:rPr lang="en-US" sz="1400" dirty="0"/>
+              <a:t> &amp; Toonen</a:t>
+            </a:r>
+          </a:p>
+        </p:txBody>
+      </p:sp>
+      <p:sp>
+        <p:nvSpPr>
+          <p:cNvPr id="2" name="TextBox 1">
+            <a:extLst>
+              <a:ext uri="{FF2B5EF4-FFF2-40B4-BE49-F238E27FC236}">
+                <a16:creationId xmlns:a16="http://schemas.microsoft.com/office/drawing/2014/main" id="{37CDF095-F06B-D5F2-4FA8-C5AE45C840B3}"/>
+              </a:ext>
+            </a:extLst>
+          </p:cNvPr>
+          <p:cNvSpPr txBox="1"/>
+          <p:nvPr/>
+        </p:nvSpPr>
+        <p:spPr>
+          <a:xfrm>
+            <a:off x="-446704" y="1072241"/>
+            <a:ext cx="875240" cy="369332"/>
+          </a:xfrm>
+          <a:prstGeom prst="rect">
+            <a:avLst/>
+          </a:prstGeom>
+          <a:noFill/>
+        </p:spPr>
+        <p:txBody>
+          <a:bodyPr wrap="none" rtlCol="0">
+            <a:spAutoFit/>
+          </a:bodyPr>
+          <a:lstStyle/>
+          <a:p>
+            <a:pPr algn="ctr"/>
+            <a:r>
+              <a:rPr lang="en-US" dirty="0"/>
+              <a:t>Level 1</a:t>
+            </a:r>
+          </a:p>
+        </p:txBody>
+      </p:sp>
+      <p:sp>
+        <p:nvSpPr>
+          <p:cNvPr id="3" name="TextBox 2">
+            <a:extLst>
+              <a:ext uri="{FF2B5EF4-FFF2-40B4-BE49-F238E27FC236}">
+                <a16:creationId xmlns:a16="http://schemas.microsoft.com/office/drawing/2014/main" id="{C9B374B9-FE9B-9EF1-A8B2-3E34DE44074F}"/>
+              </a:ext>
+            </a:extLst>
+          </p:cNvPr>
+          <p:cNvSpPr txBox="1"/>
+          <p:nvPr/>
+        </p:nvSpPr>
+        <p:spPr>
+          <a:xfrm>
+            <a:off x="-466430" y="2364735"/>
+            <a:ext cx="875240" cy="369332"/>
+          </a:xfrm>
+          <a:prstGeom prst="rect">
+            <a:avLst/>
+          </a:prstGeom>
+          <a:noFill/>
+        </p:spPr>
+        <p:txBody>
+          <a:bodyPr wrap="none" rtlCol="0">
+            <a:spAutoFit/>
+          </a:bodyPr>
+          <a:lstStyle/>
+          <a:p>
+            <a:pPr algn="ctr"/>
+            <a:r>
+              <a:rPr lang="en-US" dirty="0"/>
+              <a:t>Level 2</a:t>
+            </a:r>
+          </a:p>
+        </p:txBody>
+      </p:sp>
+      <p:sp>
+        <p:nvSpPr>
+          <p:cNvPr id="15" name="TextBox 14">
+            <a:extLst>
+              <a:ext uri="{FF2B5EF4-FFF2-40B4-BE49-F238E27FC236}">
+                <a16:creationId xmlns:a16="http://schemas.microsoft.com/office/drawing/2014/main" id="{002F6987-7FC0-BCB1-29BB-D24F727D5235}"/>
+              </a:ext>
+            </a:extLst>
+          </p:cNvPr>
+          <p:cNvSpPr txBox="1"/>
+          <p:nvPr/>
+        </p:nvSpPr>
+        <p:spPr>
+          <a:xfrm>
+            <a:off x="4861096" y="2222682"/>
+            <a:ext cx="1361270" cy="276999"/>
+          </a:xfrm>
+          <a:prstGeom prst="rect">
+            <a:avLst/>
+          </a:prstGeom>
+          <a:noFill/>
+        </p:spPr>
+        <p:txBody>
+          <a:bodyPr wrap="none" rtlCol="0">
+            <a:spAutoFit/>
+          </a:bodyPr>
+          <a:lstStyle/>
+          <a:p>
+            <a:pPr algn="ctr"/>
+            <a:r>
+              <a:rPr lang="en-US" sz="1200" dirty="0"/>
+              <a:t>(CE not specified)</a:t>
+            </a:r>
+          </a:p>
+        </p:txBody>
+      </p:sp>
+      <p:cxnSp>
+        <p:nvCxnSpPr>
+          <p:cNvPr id="17" name="Straight Arrow Connector 16">
+            <a:extLst>
+              <a:ext uri="{FF2B5EF4-FFF2-40B4-BE49-F238E27FC236}">
+                <a16:creationId xmlns:a16="http://schemas.microsoft.com/office/drawing/2014/main" id="{24992E80-346C-D4DB-22B5-E4178BFD315D}"/>
+              </a:ext>
+            </a:extLst>
+          </p:cNvPr>
+          <p:cNvCxnSpPr>
+            <a:cxnSpLocks/>
+          </p:cNvCxnSpPr>
+          <p:nvPr/>
+        </p:nvCxnSpPr>
+        <p:spPr>
+          <a:xfrm>
+            <a:off x="8172855" y="877174"/>
+            <a:ext cx="0" cy="796698"/>
+          </a:xfrm>
+          <a:prstGeom prst="straightConnector1">
+            <a:avLst/>
+          </a:prstGeom>
+          <a:ln w="57150">
+            <a:tailEnd type="triangle"/>
+          </a:ln>
+        </p:spPr>
+        <p:style>
+          <a:lnRef idx="2">
+            <a:schemeClr val="dk1"/>
+          </a:lnRef>
+          <a:fillRef idx="0">
+            <a:schemeClr val="dk1"/>
+          </a:fillRef>
+          <a:effectRef idx="1">
+            <a:schemeClr val="dk1"/>
+          </a:effectRef>
+          <a:fontRef idx="minor">
+            <a:schemeClr val="tx1"/>
+          </a:fontRef>
+        </p:style>
+      </p:cxnSp>
+      <p:cxnSp>
+        <p:nvCxnSpPr>
+          <p:cNvPr id="21" name="Straight Arrow Connector 20">
+            <a:extLst>
+              <a:ext uri="{FF2B5EF4-FFF2-40B4-BE49-F238E27FC236}">
+                <a16:creationId xmlns:a16="http://schemas.microsoft.com/office/drawing/2014/main" id="{4481646C-90F1-3175-F7C4-18CA1BB6577B}"/>
+              </a:ext>
+            </a:extLst>
+          </p:cNvPr>
+          <p:cNvCxnSpPr>
+            <a:cxnSpLocks/>
+          </p:cNvCxnSpPr>
+          <p:nvPr/>
+        </p:nvCxnSpPr>
+        <p:spPr>
+          <a:xfrm>
+            <a:off x="5477240" y="858558"/>
+            <a:ext cx="0" cy="796698"/>
+          </a:xfrm>
+          <a:prstGeom prst="straightConnector1">
+            <a:avLst/>
+          </a:prstGeom>
+          <a:ln w="57150">
+            <a:tailEnd type="triangle"/>
+          </a:ln>
+        </p:spPr>
+        <p:style>
+          <a:lnRef idx="2">
+            <a:schemeClr val="dk1"/>
+          </a:lnRef>
+          <a:fillRef idx="0">
+            <a:schemeClr val="dk1"/>
+          </a:fillRef>
+          <a:effectRef idx="1">
+            <a:schemeClr val="dk1"/>
+          </a:effectRef>
+          <a:fontRef idx="minor">
+            <a:schemeClr val="tx1"/>
+          </a:fontRef>
+        </p:style>
+      </p:cxnSp>
+      <p:sp>
+        <p:nvSpPr>
+          <p:cNvPr id="23" name="TextBox 22">
+            <a:extLst>
+              <a:ext uri="{FF2B5EF4-FFF2-40B4-BE49-F238E27FC236}">
+                <a16:creationId xmlns:a16="http://schemas.microsoft.com/office/drawing/2014/main" id="{FC80382B-91F6-1DF5-A45D-757B27C08C55}"/>
+              </a:ext>
+            </a:extLst>
+          </p:cNvPr>
+          <p:cNvSpPr txBox="1"/>
+          <p:nvPr/>
+        </p:nvSpPr>
+        <p:spPr>
+          <a:xfrm>
+            <a:off x="-383177" y="9365496"/>
+            <a:ext cx="3378695" cy="2155315"/>
+          </a:xfrm>
+          <a:prstGeom prst="rect">
+            <a:avLst/>
+          </a:prstGeom>
+          <a:noFill/>
+          <a:ln w="12700">
+            <a:solidFill>
+              <a:schemeClr val="tx1"/>
+            </a:solidFill>
+            <a:prstDash val="sysDot"/>
+          </a:ln>
+        </p:spPr>
+        <p:txBody>
+          <a:bodyPr wrap="square" rtlCol="0">
+            <a:spAutoFit/>
+          </a:bodyPr>
+          <a:lstStyle/>
+          <a:p>
             <a:endParaRPr lang="en-US" dirty="0"/>
+          </a:p>
+        </p:txBody>
+      </p:sp>
+      <p:sp>
+        <p:nvSpPr>
+          <p:cNvPr id="22" name="TextBox 21">
+            <a:extLst>
+              <a:ext uri="{FF2B5EF4-FFF2-40B4-BE49-F238E27FC236}">
+                <a16:creationId xmlns:a16="http://schemas.microsoft.com/office/drawing/2014/main" id="{FDC7EAFA-5053-E9F9-01B2-4C1AEE10AD97}"/>
+              </a:ext>
+            </a:extLst>
+          </p:cNvPr>
+          <p:cNvSpPr txBox="1"/>
+          <p:nvPr/>
+        </p:nvSpPr>
+        <p:spPr>
+          <a:xfrm>
+            <a:off x="5515003" y="1068150"/>
+            <a:ext cx="936475" cy="246221"/>
+          </a:xfrm>
+          <a:prstGeom prst="rect">
+            <a:avLst/>
+          </a:prstGeom>
+          <a:noFill/>
+        </p:spPr>
+        <p:txBody>
+          <a:bodyPr wrap="none" rtlCol="0">
+            <a:spAutoFit/>
+          </a:bodyPr>
+          <a:lstStyle/>
+          <a:p>
+            <a:r>
+              <a:rPr lang="en-US" sz="1000" dirty="0" err="1"/>
+              <a:t>Olejak</a:t>
+            </a:r>
+            <a:r>
+              <a:rPr lang="en-US" sz="1000" dirty="0"/>
+              <a:t> (2021)</a:t>
+            </a:r>
           </a:p>
         </p:txBody>
       </p:sp>

--- a/plottingCode/Fig1_schematic/formation_channels_legend.pptx
+++ b/plottingCode/Fig1_schematic/formation_channels_legend.pptx
@@ -212,7 +212,7 @@
           <a:p>
             <a:fld id="{BDAC1B45-61CC-B64D-BCEF-949BE053BD15}" type="datetimeFigureOut">
               <a:rPr lang="en-US" smtClean="0"/>
-              <a:t>2/10/26</a:t>
+              <a:t>4/20/26</a:t>
             </a:fld>
             <a:endParaRPr lang="en-US"/>
           </a:p>
@@ -1126,7 +1126,7 @@
           <a:p>
             <a:fld id="{DA65CD7A-DB9E-E745-8EE8-D0AEE8EA9938}" type="datetimeFigureOut">
               <a:rPr lang="en-US" smtClean="0"/>
-              <a:t>2/10/26</a:t>
+              <a:t>4/20/26</a:t>
             </a:fld>
             <a:endParaRPr lang="en-US"/>
           </a:p>
@@ -1296,7 +1296,7 @@
           <a:p>
             <a:fld id="{DA65CD7A-DB9E-E745-8EE8-D0AEE8EA9938}" type="datetimeFigureOut">
               <a:rPr lang="en-US" smtClean="0"/>
-              <a:t>2/10/26</a:t>
+              <a:t>4/20/26</a:t>
             </a:fld>
             <a:endParaRPr lang="en-US"/>
           </a:p>
@@ -1476,7 +1476,7 @@
           <a:p>
             <a:fld id="{DA65CD7A-DB9E-E745-8EE8-D0AEE8EA9938}" type="datetimeFigureOut">
               <a:rPr lang="en-US" smtClean="0"/>
-              <a:t>2/10/26</a:t>
+              <a:t>4/20/26</a:t>
             </a:fld>
             <a:endParaRPr lang="en-US"/>
           </a:p>
@@ -1646,7 +1646,7 @@
           <a:p>
             <a:fld id="{DA65CD7A-DB9E-E745-8EE8-D0AEE8EA9938}" type="datetimeFigureOut">
               <a:rPr lang="en-US" smtClean="0"/>
-              <a:t>2/10/26</a:t>
+              <a:t>4/20/26</a:t>
             </a:fld>
             <a:endParaRPr lang="en-US"/>
           </a:p>
@@ -1892,7 +1892,7 @@
           <a:p>
             <a:fld id="{DA65CD7A-DB9E-E745-8EE8-D0AEE8EA9938}" type="datetimeFigureOut">
               <a:rPr lang="en-US" smtClean="0"/>
-              <a:t>2/10/26</a:t>
+              <a:t>4/20/26</a:t>
             </a:fld>
             <a:endParaRPr lang="en-US"/>
           </a:p>
@@ -2124,7 +2124,7 @@
           <a:p>
             <a:fld id="{DA65CD7A-DB9E-E745-8EE8-D0AEE8EA9938}" type="datetimeFigureOut">
               <a:rPr lang="en-US" smtClean="0"/>
-              <a:t>2/10/26</a:t>
+              <a:t>4/20/26</a:t>
             </a:fld>
             <a:endParaRPr lang="en-US"/>
           </a:p>
@@ -2491,7 +2491,7 @@
           <a:p>
             <a:fld id="{DA65CD7A-DB9E-E745-8EE8-D0AEE8EA9938}" type="datetimeFigureOut">
               <a:rPr lang="en-US" smtClean="0"/>
-              <a:t>2/10/26</a:t>
+              <a:t>4/20/26</a:t>
             </a:fld>
             <a:endParaRPr lang="en-US"/>
           </a:p>
@@ -2609,7 +2609,7 @@
           <a:p>
             <a:fld id="{DA65CD7A-DB9E-E745-8EE8-D0AEE8EA9938}" type="datetimeFigureOut">
               <a:rPr lang="en-US" smtClean="0"/>
-              <a:t>2/10/26</a:t>
+              <a:t>4/20/26</a:t>
             </a:fld>
             <a:endParaRPr lang="en-US"/>
           </a:p>
@@ -2704,7 +2704,7 @@
           <a:p>
             <a:fld id="{DA65CD7A-DB9E-E745-8EE8-D0AEE8EA9938}" type="datetimeFigureOut">
               <a:rPr lang="en-US" smtClean="0"/>
-              <a:t>2/10/26</a:t>
+              <a:t>4/20/26</a:t>
             </a:fld>
             <a:endParaRPr lang="en-US"/>
           </a:p>
@@ -2981,7 +2981,7 @@
           <a:p>
             <a:fld id="{DA65CD7A-DB9E-E745-8EE8-D0AEE8EA9938}" type="datetimeFigureOut">
               <a:rPr lang="en-US" smtClean="0"/>
-              <a:t>2/10/26</a:t>
+              <a:t>4/20/26</a:t>
             </a:fld>
             <a:endParaRPr lang="en-US"/>
           </a:p>
@@ -3238,7 +3238,7 @@
           <a:p>
             <a:fld id="{DA65CD7A-DB9E-E745-8EE8-D0AEE8EA9938}" type="datetimeFigureOut">
               <a:rPr lang="en-US" smtClean="0"/>
-              <a:t>2/10/26</a:t>
+              <a:t>4/20/26</a:t>
             </a:fld>
             <a:endParaRPr lang="en-US"/>
           </a:p>
@@ -3451,7 +3451,7 @@
           <a:p>
             <a:fld id="{DA65CD7A-DB9E-E745-8EE8-D0AEE8EA9938}" type="datetimeFigureOut">
               <a:rPr lang="en-US" smtClean="0"/>
-              <a:t>2/10/26</a:t>
+              <a:t>4/20/26</a:t>
             </a:fld>
             <a:endParaRPr lang="en-US"/>
           </a:p>
@@ -25848,7 +25848,7 @@
           </p:nvSpPr>
           <p:spPr>
             <a:xfrm>
-              <a:off x="882158" y="2107238"/>
+              <a:off x="882160" y="2107238"/>
               <a:ext cx="2835841" cy="369332"/>
             </a:xfrm>
             <a:prstGeom prst="rect">
@@ -26194,7 +26194,7 @@
               <a:pPr algn="ctr"/>
               <a:r>
                 <a:rPr lang="en-US" dirty="0"/>
-                <a:t>classic OSMT</a:t>
+                <a:t>classic SMT</a:t>
               </a:r>
               <a:br>
                 <a:rPr lang="en-US" dirty="0"/>
@@ -26815,7 +26815,7 @@
               <a:pPr algn="ctr"/>
               <a:r>
                 <a:rPr lang="en-US" dirty="0"/>
-                <a:t>(SMT+CEE)</a:t>
+                <a:t>(SMT+CE)</a:t>
               </a:r>
             </a:p>
           </p:txBody>
